--- a/Phoebe Nabunya Presentation.pptx
+++ b/Phoebe Nabunya Presentation.pptx
@@ -233,7 +233,7 @@
           <a:p>
             <a:fld id="{F3D18136-300B-4779-A4DC-C542495C3F58}" type="datetimeFigureOut">
               <a:rPr lang="en-GB" smtClean="0"/>
-              <a:t>28/04/2026</a:t>
+              <a:t>30/04/2026</a:t>
             </a:fld>
             <a:endParaRPr lang="en-GB"/>
           </a:p>
@@ -1886,7 +1886,7 @@
           <a:p>
             <a:fld id="{01F721B2-F283-4269-A774-3A16161286AC}" type="datetimeFigureOut">
               <a:rPr lang="en-GB" smtClean="0"/>
-              <a:t>22/04/2026</a:t>
+              <a:t>30/04/2026</a:t>
             </a:fld>
             <a:endParaRPr lang="en-GB"/>
           </a:p>
@@ -2056,7 +2056,7 @@
           <a:p>
             <a:fld id="{01F721B2-F283-4269-A774-3A16161286AC}" type="datetimeFigureOut">
               <a:rPr lang="en-GB" smtClean="0"/>
-              <a:t>22/04/2026</a:t>
+              <a:t>30/04/2026</a:t>
             </a:fld>
             <a:endParaRPr lang="en-GB"/>
           </a:p>
@@ -2236,7 +2236,7 @@
           <a:p>
             <a:fld id="{01F721B2-F283-4269-A774-3A16161286AC}" type="datetimeFigureOut">
               <a:rPr lang="en-GB" smtClean="0"/>
-              <a:t>22/04/2026</a:t>
+              <a:t>30/04/2026</a:t>
             </a:fld>
             <a:endParaRPr lang="en-GB"/>
           </a:p>
@@ -2406,7 +2406,7 @@
           <a:p>
             <a:fld id="{01F721B2-F283-4269-A774-3A16161286AC}" type="datetimeFigureOut">
               <a:rPr lang="en-GB" smtClean="0"/>
-              <a:t>22/04/2026</a:t>
+              <a:t>30/04/2026</a:t>
             </a:fld>
             <a:endParaRPr lang="en-GB"/>
           </a:p>
@@ -2652,7 +2652,7 @@
           <a:p>
             <a:fld id="{01F721B2-F283-4269-A774-3A16161286AC}" type="datetimeFigureOut">
               <a:rPr lang="en-GB" smtClean="0"/>
-              <a:t>22/04/2026</a:t>
+              <a:t>30/04/2026</a:t>
             </a:fld>
             <a:endParaRPr lang="en-GB"/>
           </a:p>
@@ -2884,7 +2884,7 @@
           <a:p>
             <a:fld id="{01F721B2-F283-4269-A774-3A16161286AC}" type="datetimeFigureOut">
               <a:rPr lang="en-GB" smtClean="0"/>
-              <a:t>22/04/2026</a:t>
+              <a:t>30/04/2026</a:t>
             </a:fld>
             <a:endParaRPr lang="en-GB"/>
           </a:p>
@@ -3251,7 +3251,7 @@
           <a:p>
             <a:fld id="{01F721B2-F283-4269-A774-3A16161286AC}" type="datetimeFigureOut">
               <a:rPr lang="en-GB" smtClean="0"/>
-              <a:t>22/04/2026</a:t>
+              <a:t>30/04/2026</a:t>
             </a:fld>
             <a:endParaRPr lang="en-GB"/>
           </a:p>
@@ -3369,7 +3369,7 @@
           <a:p>
             <a:fld id="{01F721B2-F283-4269-A774-3A16161286AC}" type="datetimeFigureOut">
               <a:rPr lang="en-GB" smtClean="0"/>
-              <a:t>22/04/2026</a:t>
+              <a:t>30/04/2026</a:t>
             </a:fld>
             <a:endParaRPr lang="en-GB"/>
           </a:p>
@@ -3464,7 +3464,7 @@
           <a:p>
             <a:fld id="{01F721B2-F283-4269-A774-3A16161286AC}" type="datetimeFigureOut">
               <a:rPr lang="en-GB" smtClean="0"/>
-              <a:t>22/04/2026</a:t>
+              <a:t>30/04/2026</a:t>
             </a:fld>
             <a:endParaRPr lang="en-GB"/>
           </a:p>
@@ -3741,7 +3741,7 @@
           <a:p>
             <a:fld id="{01F721B2-F283-4269-A774-3A16161286AC}" type="datetimeFigureOut">
               <a:rPr lang="en-GB" smtClean="0"/>
-              <a:t>22/04/2026</a:t>
+              <a:t>30/04/2026</a:t>
             </a:fld>
             <a:endParaRPr lang="en-GB"/>
           </a:p>
@@ -3994,7 +3994,7 @@
           <a:p>
             <a:fld id="{01F721B2-F283-4269-A774-3A16161286AC}" type="datetimeFigureOut">
               <a:rPr lang="en-GB" smtClean="0"/>
-              <a:t>22/04/2026</a:t>
+              <a:t>30/04/2026</a:t>
             </a:fld>
             <a:endParaRPr lang="en-GB"/>
           </a:p>
@@ -4207,7 +4207,7 @@
           <a:p>
             <a:fld id="{01F721B2-F283-4269-A774-3A16161286AC}" type="datetimeFigureOut">
               <a:rPr lang="en-GB" smtClean="0"/>
-              <a:t>22/04/2026</a:t>
+              <a:t>30/04/2026</a:t>
             </a:fld>
             <a:endParaRPr lang="en-GB"/>
           </a:p>
@@ -4780,21 +4780,7 @@
                 <a:latin typeface="Times New Roman" panose="02020603050405020304" pitchFamily="18" charset="0"/>
                 <a:cs typeface="Times New Roman" panose="02020603050405020304" pitchFamily="18" charset="0"/>
               </a:rPr>
-              <a:t>White is the largest </a:t>
-            </a:r>
-            <a:r>
-              <a:rPr lang="en-GB" sz="2400" dirty="0">
-                <a:latin typeface="Times New Roman" panose="02020603050405020304" pitchFamily="18" charset="0"/>
-                <a:cs typeface="Times New Roman" panose="02020603050405020304" pitchFamily="18" charset="0"/>
-              </a:rPr>
-              <a:t>ethnicity</a:t>
-            </a:r>
-            <a:r>
-              <a:rPr lang="en-GB" sz="2400" dirty="0">
-                <a:latin typeface="Times New Roman" panose="02020603050405020304" pitchFamily="18" charset="0"/>
-                <a:cs typeface="Times New Roman" panose="02020603050405020304" pitchFamily="18" charset="0"/>
-              </a:rPr>
-              <a:t> and highest paid</a:t>
+              <a:t>White is the largest ethnicity and highest paid</a:t>
             </a:r>
           </a:p>
           <a:p>
@@ -5002,19 +4988,8 @@
                 <a:latin typeface="Times New Roman" panose="02020603050405020304" pitchFamily="18" charset="0"/>
                 <a:cs typeface="Times New Roman" panose="02020603050405020304" pitchFamily="18" charset="0"/>
               </a:rPr>
-              <a:t>E</a:t>
-            </a:r>
-            <a:r>
-              <a:rPr lang="en-GB" sz="2400" dirty="0">
-                <a:latin typeface="Times New Roman" panose="02020603050405020304" pitchFamily="18" charset="0"/>
-                <a:cs typeface="Times New Roman" panose="02020603050405020304" pitchFamily="18" charset="0"/>
-              </a:rPr>
-              <a:t>qual distribution  male and female employees, and a lower percentage of non-binary </a:t>
-            </a:r>
-            <a:endParaRPr lang="en-GB" sz="2400" dirty="0">
-              <a:latin typeface="Times New Roman" panose="02020603050405020304" pitchFamily="18" charset="0"/>
-              <a:cs typeface="Times New Roman" panose="02020603050405020304" pitchFamily="18" charset="0"/>
-            </a:endParaRPr>
+              <a:t>Equal distribution  male and female employees, and a lower percentage of non-binary </a:t>
+            </a:r>
           </a:p>
         </p:txBody>
       </p:sp>
@@ -5153,21 +5128,7 @@
                 <a:latin typeface="Times New Roman" panose="02020603050405020304" pitchFamily="18" charset="0"/>
                 <a:cs typeface="Times New Roman" panose="02020603050405020304" pitchFamily="18" charset="0"/>
               </a:rPr>
-              <a:t>Sales  </a:t>
-            </a:r>
-            <a:r>
-              <a:rPr lang="en-GB" sz="2000" dirty="0">
-                <a:latin typeface="Times New Roman" panose="02020603050405020304" pitchFamily="18" charset="0"/>
-                <a:cs typeface="Times New Roman" panose="02020603050405020304" pitchFamily="18" charset="0"/>
-              </a:rPr>
-              <a:t>Executive</a:t>
-            </a:r>
-            <a:r>
-              <a:rPr lang="en-GB" sz="2000" dirty="0">
-                <a:latin typeface="Times New Roman" panose="02020603050405020304" pitchFamily="18" charset="0"/>
-                <a:cs typeface="Times New Roman" panose="02020603050405020304" pitchFamily="18" charset="0"/>
-              </a:rPr>
-              <a:t> in Technology is presumed to be a Business Relationship Manager</a:t>
+              <a:t>Sales  Executive in Technology is presumed to be a Business Relationship Manager</a:t>
             </a:r>
           </a:p>
           <a:p>
@@ -5477,15 +5438,7 @@
             </a:pPr>
             <a:r>
               <a:rPr lang="en-GB" sz="2400" dirty="0"/>
-              <a:t>Sales Representatives have the highest </a:t>
-            </a:r>
-            <a:r>
-              <a:rPr lang="en-GB" sz="2400" dirty="0"/>
-              <a:t>number</a:t>
-            </a:r>
-            <a:r>
-              <a:rPr lang="en-GB" sz="2400" dirty="0"/>
-              <a:t> of attrition followed by the Recruiters</a:t>
+              <a:t>Sales Representatives have the highest number of attrition followed by the Recruiters</a:t>
             </a:r>
             <a:r>
               <a:rPr lang="en-GB" sz="2000" dirty="0" smtClean="0"/>
@@ -6033,14 +5986,7 @@
                 <a:latin typeface="Times New Roman" panose="02020603050405020304" pitchFamily="18" charset="0"/>
                 <a:cs typeface="Times New Roman" panose="02020603050405020304" pitchFamily="18" charset="0"/>
               </a:rPr>
-              <a:t>High </a:t>
-            </a:r>
-            <a:r>
-              <a:rPr lang="en-GB" sz="2400" dirty="0" smtClean="0">
-                <a:latin typeface="Times New Roman" panose="02020603050405020304" pitchFamily="18" charset="0"/>
-                <a:cs typeface="Times New Roman" panose="02020603050405020304" pitchFamily="18" charset="0"/>
-              </a:rPr>
-              <a:t>rate of attrition when the manager rating is lower than the employee self rating </a:t>
+              <a:t>High rate of attrition when the manager rating is lower than the employee self rating </a:t>
             </a:r>
           </a:p>
           <a:p>
@@ -6392,21 +6338,7 @@
                 <a:latin typeface="Times New Roman" panose="02020603050405020304" pitchFamily="18" charset="0"/>
                 <a:cs typeface="Times New Roman" panose="02020603050405020304" pitchFamily="18" charset="0"/>
               </a:rPr>
-              <a:t>16.1% is the attrition rate, </a:t>
-            </a:r>
-            <a:r>
-              <a:rPr lang="en-GB" sz="3500" dirty="0" smtClean="0">
-                <a:latin typeface="Times New Roman" panose="02020603050405020304" pitchFamily="18" charset="0"/>
-                <a:cs typeface="Times New Roman" panose="02020603050405020304" pitchFamily="18" charset="0"/>
-              </a:rPr>
-              <a:t>1470 total </a:t>
-            </a:r>
-            <a:r>
-              <a:rPr lang="en-GB" sz="3500" dirty="0" smtClean="0">
-                <a:latin typeface="Times New Roman" panose="02020603050405020304" pitchFamily="18" charset="0"/>
-                <a:cs typeface="Times New Roman" panose="02020603050405020304" pitchFamily="18" charset="0"/>
-              </a:rPr>
-              <a:t>employees </a:t>
+              <a:t>16.1% is the attrition rate, 1470 total employees </a:t>
             </a:r>
             <a:endParaRPr lang="en-GB" sz="3500" dirty="0">
               <a:latin typeface="Times New Roman" panose="02020603050405020304" pitchFamily="18" charset="0"/>
@@ -6430,10 +6362,6 @@
               </a:rPr>
               <a:t> </a:t>
             </a:r>
-            <a:endParaRPr lang="en-GB" sz="3500" dirty="0" smtClean="0">
-              <a:latin typeface="Times New Roman" panose="02020603050405020304" pitchFamily="18" charset="0"/>
-              <a:cs typeface="Times New Roman" panose="02020603050405020304" pitchFamily="18" charset="0"/>
-            </a:endParaRPr>
           </a:p>
           <a:p>
             <a:endParaRPr lang="en-GB" dirty="0"/>
@@ -9273,11 +9201,7 @@
             <a:pPr algn="l"/>
             <a:r>
               <a:rPr lang="en-GB" sz="4000" b="1" dirty="0"/>
-              <a:t>Dataset </a:t>
-            </a:r>
-            <a:r>
-              <a:rPr lang="en-GB" sz="4000" b="1" dirty="0"/>
-              <a:t>description</a:t>
+              <a:t>Dataset description</a:t>
             </a:r>
           </a:p>
         </p:txBody>
@@ -10452,13 +10376,17 @@
             </a:r>
             <a:r>
               <a:rPr lang="en-GB" b="1" dirty="0" smtClean="0"/>
-              <a:t> demo interface: </a:t>
-            </a:r>
-            <a:r>
-              <a:rPr lang="en-GB" dirty="0">
+              <a:t> demo interface</a:t>
+            </a:r>
+            <a:r>
+              <a:rPr lang="en-GB" b="1" smtClean="0"/>
+              <a:t>: </a:t>
+            </a:r>
+            <a:r>
+              <a:rPr lang="en-GB">
                 <a:hlinkClick r:id="rId2"/>
               </a:rPr>
-              <a:t>https://dc379117c7a6e47f94.gradio.live</a:t>
+              <a:t>https://ccd4566014d9563b86.gradio.live</a:t>
             </a:r>
             <a:endParaRPr lang="en-GB" b="1" dirty="0"/>
           </a:p>
@@ -19072,21 +19000,7 @@
                 <a:latin typeface="Times New Roman" panose="02020603050405020304" pitchFamily="18" charset="0"/>
                 <a:cs typeface="Times New Roman" panose="02020603050405020304" pitchFamily="18" charset="0"/>
               </a:rPr>
-              <a:t>The </a:t>
-            </a:r>
-            <a:r>
-              <a:rPr lang="en-GB" sz="2400" dirty="0" smtClean="0">
-                <a:latin typeface="Times New Roman" panose="02020603050405020304" pitchFamily="18" charset="0"/>
-                <a:cs typeface="Times New Roman" panose="02020603050405020304" pitchFamily="18" charset="0"/>
-              </a:rPr>
-              <a:t>dataset has </a:t>
-            </a:r>
-            <a:r>
-              <a:rPr lang="en-GB" sz="2400" dirty="0" smtClean="0">
-                <a:latin typeface="Times New Roman" panose="02020603050405020304" pitchFamily="18" charset="0"/>
-                <a:cs typeface="Times New Roman" panose="02020603050405020304" pitchFamily="18" charset="0"/>
-              </a:rPr>
-              <a:t>1470 </a:t>
+              <a:t>The dataset has 1470 </a:t>
             </a:r>
             <a:r>
               <a:rPr lang="en-GB" sz="2400" dirty="0">
@@ -19100,35 +19014,7 @@
                 <a:latin typeface="Times New Roman" panose="02020603050405020304" pitchFamily="18" charset="0"/>
                 <a:cs typeface="Times New Roman" panose="02020603050405020304" pitchFamily="18" charset="0"/>
               </a:rPr>
-              <a:t>otal staff members; 1231 current </a:t>
-            </a:r>
-            <a:r>
-              <a:rPr lang="en-GB" sz="2400" dirty="0" smtClean="0">
-                <a:latin typeface="Times New Roman" panose="02020603050405020304" pitchFamily="18" charset="0"/>
-                <a:cs typeface="Times New Roman" panose="02020603050405020304" pitchFamily="18" charset="0"/>
-              </a:rPr>
-              <a:t>employees (Attrition: No) </a:t>
-            </a:r>
-            <a:r>
-              <a:rPr lang="en-GB" sz="2400" dirty="0" smtClean="0">
-                <a:latin typeface="Times New Roman" panose="02020603050405020304" pitchFamily="18" charset="0"/>
-                <a:cs typeface="Times New Roman" panose="02020603050405020304" pitchFamily="18" charset="0"/>
-              </a:rPr>
-              <a:t>and 237 </a:t>
-            </a:r>
-            <a:r>
-              <a:rPr lang="en-GB" sz="2400" dirty="0" smtClean="0">
-                <a:latin typeface="Times New Roman" panose="02020603050405020304" pitchFamily="18" charset="0"/>
-                <a:cs typeface="Times New Roman" panose="02020603050405020304" pitchFamily="18" charset="0"/>
-              </a:rPr>
-              <a:t>employees (Attrition Yes) </a:t>
-            </a:r>
-            <a:r>
-              <a:rPr lang="en-GB" sz="2400" dirty="0" smtClean="0">
-                <a:latin typeface="Times New Roman" panose="02020603050405020304" pitchFamily="18" charset="0"/>
-                <a:cs typeface="Times New Roman" panose="02020603050405020304" pitchFamily="18" charset="0"/>
-              </a:rPr>
-              <a:t>have left the organisation.  </a:t>
+              <a:t>otal staff members; 1231 current employees (Attrition: No) and 237 employees (Attrition Yes) have left the organisation.  </a:t>
             </a:r>
           </a:p>
           <a:p>
@@ -19166,14 +19052,7 @@
                 <a:latin typeface="Times New Roman" panose="02020603050405020304" pitchFamily="18" charset="0"/>
                 <a:cs typeface="Times New Roman" panose="02020603050405020304" pitchFamily="18" charset="0"/>
               </a:rPr>
-              <a:t>190 </a:t>
-            </a:r>
-            <a:r>
-              <a:rPr lang="en-GB" sz="2400" dirty="0" smtClean="0">
-                <a:latin typeface="Times New Roman" panose="02020603050405020304" pitchFamily="18" charset="0"/>
-                <a:cs typeface="Times New Roman" panose="02020603050405020304" pitchFamily="18" charset="0"/>
-              </a:rPr>
-              <a:t>employees hired between 2021 and 2022 have missing performance records  </a:t>
+              <a:t>190 employees hired between 2021 and 2022 have missing performance records  </a:t>
             </a:r>
           </a:p>
           <a:p>
@@ -19356,21 +19235,7 @@
                 <a:latin typeface="Times New Roman" panose="02020603050405020304" pitchFamily="18" charset="0"/>
                 <a:cs typeface="Times New Roman" panose="02020603050405020304" pitchFamily="18" charset="0"/>
               </a:rPr>
-              <a:t> There is a significant number of employees who are </a:t>
-            </a:r>
-            <a:r>
-              <a:rPr lang="en-GB" sz="2400" dirty="0" smtClean="0">
-                <a:latin typeface="Times New Roman" panose="02020603050405020304" pitchFamily="18" charset="0"/>
-                <a:cs typeface="Times New Roman" panose="02020603050405020304" pitchFamily="18" charset="0"/>
-              </a:rPr>
-              <a:t>paid </a:t>
-            </a:r>
-            <a:r>
-              <a:rPr lang="en-GB" sz="2400" dirty="0" smtClean="0">
-                <a:latin typeface="Times New Roman" panose="02020603050405020304" pitchFamily="18" charset="0"/>
-                <a:cs typeface="Times New Roman" panose="02020603050405020304" pitchFamily="18" charset="0"/>
-              </a:rPr>
-              <a:t>higher than the median point: USD 75,000</a:t>
+              <a:t> There is a significant number of employees who are paid higher than the median point: USD 75,000</a:t>
             </a:r>
           </a:p>
           <a:p>
